--- a/lecons/USA/Settlement Geography/25_USA_SET_FS01_Urbanisation_in_Cameroon.pptx
+++ b/lecons/USA/Settlement Geography/25_USA_SET_FS01_Urbanisation_in_Cameroon.pptx
@@ -3635,7 +3635,7 @@
           <a:p>
             <a:r>
               <a:rPr lang="en-US" dirty="0"/>
-              <a:t>We continue with Case Studies: Douala and Yaoundé. Copy this carefully. When you finish, we go to the next slide.</a:t>
+              <a:t>We continue with Case Studies: Douala and Yaoundé. On this slide we have It is the main port, industrial and commercial centre, but suffers from floods, slums and traffic.. Write each point on a new line, with the key term first, and explain it in your own words when we revise. When you finish, we go to the next slide.</a:t>
             </a:r>
             <a:endParaRPr lang="en-US" dirty="0"/>
           </a:p>
